--- a/assets/pptx/catalog-93.pptx
+++ b/assets/pptx/catalog-93.pptx
@@ -3266,7 +3266,7 @@
                 <a:ea typeface="Ebrima"/>
                 <a:cs typeface="Ebrima"/>
               </a:rPr>
-              <a:t>በከንቱ አይጠራም ሰምህ (2)</a:t>
+              <a:t>በከንቱ አይጠራም ሰምህ 2</a:t>
             </a:r>
           </a:p>
           <a:p>
@@ -3992,7 +3992,7 @@
                 <a:ea typeface="Ebrima"/>
                 <a:cs typeface="Ebrima"/>
               </a:rPr>
-              <a:t>በከንቱ አይጠራም ሰምህ (2)</a:t>
+              <a:t>በከንቱ አይጠራም ሰምህ 2</a:t>
             </a:r>
           </a:p>
           <a:p>
@@ -4095,7 +4095,7 @@
                 <a:ea typeface="Ebrima"/>
                 <a:cs typeface="Ebrima"/>
               </a:rPr>
-              <a:t>እየሱሰ(8)</a:t>
+              <a:t>እየሱሰ8</a:t>
             </a:r>
           </a:p>
           <a:p>
@@ -4113,7 +4113,7 @@
                 <a:ea typeface="Ebrima"/>
                 <a:cs typeface="Ebrima"/>
               </a:rPr>
-              <a:t>አዳኜ (8</a:t>
+              <a:t>አዳኜ 8</a:t>
             </a:r>
           </a:p>
         </p:txBody>
